--- a/data/employees/EMP045/AST-EMP045-01.pptx
+++ b/data/employees/EMP045/AST-EMP045-01.pptx
@@ -9,6 +9,7 @@
     <p:sldId id="257" r:id="rId8"/>
     <p:sldId id="258" r:id="rId9"/>
     <p:sldId id="259" r:id="rId10"/>
+    <p:sldId id="260" r:id="rId11"/>
   </p:sldIdLst>
   <p:sldSz cx="9144000" cy="6858000" type="screen4x3"/>
   <p:notesSz cx="6858000" cy="9144000"/>
@@ -3098,42 +3099,55 @@
             <a:spLocks noGrp="1"/>
           </p:cNvSpPr>
           <p:nvPr>
-            <p:ph type="ctrTitle"/>
-          </p:nvPr>
-        </p:nvSpPr>
-        <p:spPr/>
-        <p:txBody>
-          <a:bodyPr/>
-          <a:lstStyle/>
-          <a:p>
-            <a:r>
-              <a:t>Project update deck - EMP045</a:t>
-            </a:r>
-          </a:p>
-        </p:txBody>
-      </p:sp>
-      <p:sp>
-        <p:nvSpPr>
-          <p:cNvPr id="3" name="Subtitle 2"/>
-          <p:cNvSpPr>
-            <a:spLocks noGrp="1"/>
-          </p:cNvSpPr>
-          <p:nvPr>
-            <p:ph type="subTitle" idx="1"/>
-          </p:nvPr>
-        </p:nvSpPr>
-        <p:spPr/>
-        <p:txBody>
-          <a:bodyPr/>
-          <a:lstStyle/>
-          <a:p>
-            <a:r>
-              <a:t>Casey Lee | Senior Engineer | Procurement</a:t>
-            </a:r>
-          </a:p>
-          <a:p>
-            <a:r>
-              <a:t>Prepared: 2025-02-16</a:t>
+            <p:ph type="title"/>
+          </p:nvPr>
+        </p:nvSpPr>
+        <p:spPr/>
+        <p:txBody>
+          <a:bodyPr/>
+          <a:lstStyle/>
+          <a:p>
+            <a:r>
+              <a:t>Ast Emp045 01 - EMP045</a:t>
+            </a:r>
+          </a:p>
+        </p:txBody>
+      </p:sp>
+      <p:sp>
+        <p:nvSpPr>
+          <p:cNvPr id="3" name="Content Placeholder 2"/>
+          <p:cNvSpPr>
+            <a:spLocks noGrp="1"/>
+          </p:cNvSpPr>
+          <p:nvPr>
+            <p:ph idx="1"/>
+          </p:nvPr>
+        </p:nvSpPr>
+        <p:spPr/>
+        <p:txBody>
+          <a:bodyPr/>
+          <a:lstStyle/>
+          <a:p>
+            <a:r>
+              <a:t>Slide 1: Executive Summary</a:t>
+            </a:r>
+          </a:p>
+          <a:p>
+            <a:pPr lvl="1"/>
+            <a:r>
+              <a:t>Section 1: Customer escalation analysis. EMP045 contributes to ast emp045 01 through recurring collaboration, clear ownership boundaries, and measurable outcomes. The team captures decisions, open issues, and handoffs so that knowledge remains discoverable for future programs.</a:t>
+            </a:r>
+          </a:p>
+          <a:p>
+            <a:pPr lvl="1"/>
+            <a:r>
+              <a:t>Section 2: Operational risk review. EMP045 contributes to ast emp045 01 through recurring collaboration, clear ownership boundaries, and measurable outcomes. The team captures decisions, open issues, and handoffs so that knowledge remains discoverable for future programs.</a:t>
+            </a:r>
+          </a:p>
+          <a:p>
+            <a:pPr lvl="1"/>
+            <a:r>
+              <a:t>Section 3: Knowledge transfer and onboarding. EMP045 contributes to ast emp045 01 through recurring collaboration, clear ownership boundaries, and measurable outcomes. The team captures decisions, open issues, and handoffs so that knowledge remains discoverable for future programs.</a:t>
             </a:r>
           </a:p>
         </p:txBody>
@@ -3172,7 +3186,7 @@
           <a:lstStyle/>
           <a:p>
             <a:r>
-              <a:t>Vendor Scorecard Q2</a:t>
+              <a:t>Ast Emp045 01 - EMP045</a:t>
             </a:r>
           </a:p>
         </p:txBody>
@@ -3193,17 +3207,25 @@
           <a:lstStyle/>
           <a:p>
             <a:r>
-              <a:t>Overview of Vendor Scorecard Q2 for Procurement department.</a:t>
-            </a:r>
-          </a:p>
-          <a:p>
-            <a:r>
-              <a:t>Responsible: Casey Lee (Senior Engineer)</a:t>
-            </a:r>
-          </a:p>
-          <a:p>
-            <a:r>
-              <a:t>Location: Hsinchu | Skills: Ontology, MLOps, TypeScript, Synapse</a:t>
+              <a:t>Slide 2: Executive Summary</a:t>
+            </a:r>
+          </a:p>
+          <a:p>
+            <a:pPr lvl="1"/>
+            <a:r>
+              <a:t>Section 1: Customer escalation analysis. EMP045 contributes to ast emp045 01 through recurring collaboration, clear ownership boundaries, and measurable outcomes. The team captures decisions, open issues, and handoffs so that knowledge remains discoverable for future programs.</a:t>
+            </a:r>
+          </a:p>
+          <a:p>
+            <a:pPr lvl="1"/>
+            <a:r>
+              <a:t>Section 2: Knowledge transfer and onboarding. EMP045 contributes to ast emp045 01 through recurring collaboration, clear ownership boundaries, and measurable outcomes. The team captures decisions, open issues, and handoffs so that knowledge remains discoverable for future programs.</a:t>
+            </a:r>
+          </a:p>
+          <a:p>
+            <a:pPr lvl="1"/>
+            <a:r>
+              <a:t>Section 3: Knowledge transfer and onboarding. EMP045 contributes to ast emp045 01 through recurring collaboration, clear ownership boundaries, and measurable outcomes. The team captures decisions, open issues, and handoffs so that knowledge remains discoverable for future programs.</a:t>
             </a:r>
           </a:p>
         </p:txBody>
@@ -3242,7 +3264,7 @@
           <a:lstStyle/>
           <a:p>
             <a:r>
-              <a:t>Contract Renewals Pipeline</a:t>
+              <a:t>Ast Emp045 01 - EMP045</a:t>
             </a:r>
           </a:p>
         </p:txBody>
@@ -3263,17 +3285,25 @@
           <a:lstStyle/>
           <a:p>
             <a:r>
-              <a:t>Overview of Contract Renewals Pipeline for Procurement department.</a:t>
-            </a:r>
-          </a:p>
-          <a:p>
-            <a:r>
-              <a:t>Responsible: Casey Lee (Senior Engineer)</a:t>
-            </a:r>
-          </a:p>
-          <a:p>
-            <a:r>
-              <a:t>Location: Hsinchu | Skills: Ontology, MLOps, TypeScript, Synapse</a:t>
+              <a:t>Slide 3: Executive Summary</a:t>
+            </a:r>
+          </a:p>
+          <a:p>
+            <a:pPr lvl="1"/>
+            <a:r>
+              <a:t>Section 1: Customer escalation analysis. EMP045 contributes to ast emp045 01 through recurring collaboration, clear ownership boundaries, and measurable outcomes. The team captures decisions, open issues, and handoffs so that knowledge remains discoverable for future programs.</a:t>
+            </a:r>
+          </a:p>
+          <a:p>
+            <a:pPr lvl="1"/>
+            <a:r>
+              <a:t>Section 2: Department KPI performance. EMP045 contributes to ast emp045 01 through recurring collaboration, clear ownership boundaries, and measurable outcomes. The team captures decisions, open issues, and handoffs so that knowledge remains discoverable for future programs.</a:t>
+            </a:r>
+          </a:p>
+          <a:p>
+            <a:pPr lvl="1"/>
+            <a:r>
+              <a:t>Section 3: Operational risk review. EMP045 contributes to ast emp045 01 through recurring collaboration, clear ownership boundaries, and measurable outcomes. The team captures decisions, open issues, and handoffs so that knowledge remains discoverable for future programs.</a:t>
             </a:r>
           </a:p>
         </p:txBody>
@@ -3312,7 +3342,7 @@
           <a:lstStyle/>
           <a:p>
             <a:r>
-              <a:t>Category Spend Analysis</a:t>
+              <a:t>Ast Emp045 01 - EMP045</a:t>
             </a:r>
           </a:p>
         </p:txBody>
@@ -3333,17 +3363,103 @@
           <a:lstStyle/>
           <a:p>
             <a:r>
-              <a:t>Overview of Category Spend Analysis for Procurement department.</a:t>
-            </a:r>
-          </a:p>
-          <a:p>
-            <a:r>
-              <a:t>Responsible: Casey Lee (Senior Engineer)</a:t>
-            </a:r>
-          </a:p>
-          <a:p>
-            <a:r>
-              <a:t>Location: Hsinchu | Skills: Ontology, MLOps, TypeScript, Synapse</a:t>
+              <a:t>Slide 4: Executive Summary</a:t>
+            </a:r>
+          </a:p>
+          <a:p>
+            <a:pPr lvl="1"/>
+            <a:r>
+              <a:t>Section 1: Fabric semantic model planning. EMP045 contributes to ast emp045 01 through recurring collaboration, clear ownership boundaries, and measurable outcomes. The team captures decisions, open issues, and handoffs so that knowledge remains discoverable for future programs.</a:t>
+            </a:r>
+          </a:p>
+          <a:p>
+            <a:pPr lvl="1"/>
+            <a:r>
+              <a:t>Section 2: Data quality remediation. EMP045 contributes to ast emp045 01 through recurring collaboration, clear ownership boundaries, and measurable outcomes. The team captures decisions, open issues, and handoffs so that knowledge remains discoverable for future programs.</a:t>
+            </a:r>
+          </a:p>
+          <a:p>
+            <a:pPr lvl="1"/>
+            <a:r>
+              <a:t>Section 3: Quarterly delivery milestones. EMP045 contributes to ast emp045 01 through recurring collaboration, clear ownership boundaries, and measurable outcomes. The team captures decisions, open issues, and handoffs so that knowledge remains discoverable for future programs.</a:t>
+            </a:r>
+          </a:p>
+        </p:txBody>
+      </p:sp>
+    </p:spTree>
+  </p:cSld>
+  <p:clrMapOvr>
+    <a:masterClrMapping/>
+  </p:clrMapOvr>
+</p:sld>
+</file>
+
+<file path=ppt/slides/slide5.xml><?xml version="1.0" encoding="utf-8"?>
+<p:sld xmlns:a="http://schemas.openxmlformats.org/drawingml/2006/main" xmlns:p="http://schemas.openxmlformats.org/presentationml/2006/main" xmlns:r="http://schemas.openxmlformats.org/officeDocument/2006/relationships">
+  <p:cSld>
+    <p:spTree>
+      <p:nvGrpSpPr>
+        <p:cNvPr id="1" name=""/>
+        <p:cNvGrpSpPr/>
+        <p:nvPr/>
+      </p:nvGrpSpPr>
+      <p:grpSpPr/>
+      <p:sp>
+        <p:nvSpPr>
+          <p:cNvPr id="2" name="Title 1"/>
+          <p:cNvSpPr>
+            <a:spLocks noGrp="1"/>
+          </p:cNvSpPr>
+          <p:nvPr>
+            <p:ph type="title"/>
+          </p:nvPr>
+        </p:nvSpPr>
+        <p:spPr/>
+        <p:txBody>
+          <a:bodyPr/>
+          <a:lstStyle/>
+          <a:p>
+            <a:r>
+              <a:t>Ast Emp045 01 - EMP045</a:t>
+            </a:r>
+          </a:p>
+        </p:txBody>
+      </p:sp>
+      <p:sp>
+        <p:nvSpPr>
+          <p:cNvPr id="3" name="Content Placeholder 2"/>
+          <p:cNvSpPr>
+            <a:spLocks noGrp="1"/>
+          </p:cNvSpPr>
+          <p:nvPr>
+            <p:ph idx="1"/>
+          </p:nvPr>
+        </p:nvSpPr>
+        <p:spPr/>
+        <p:txBody>
+          <a:bodyPr/>
+          <a:lstStyle/>
+          <a:p>
+            <a:r>
+              <a:t>Slide 5: Executive Summary</a:t>
+            </a:r>
+          </a:p>
+          <a:p>
+            <a:pPr lvl="1"/>
+            <a:r>
+              <a:t>Section 1: Quarterly delivery milestones. EMP045 contributes to ast emp045 01 through recurring collaboration, clear ownership boundaries, and measurable outcomes. The team captures decisions, open issues, and handoffs so that knowledge remains discoverable for future programs.</a:t>
+            </a:r>
+          </a:p>
+          <a:p>
+            <a:pPr lvl="1"/>
+            <a:r>
+              <a:t>Section 2: Quarterly delivery milestones. EMP045 contributes to ast emp045 01 through recurring collaboration, clear ownership boundaries, and measurable outcomes. The team captures decisions, open issues, and handoffs so that knowledge remains discoverable for future programs.</a:t>
+            </a:r>
+          </a:p>
+          <a:p>
+            <a:pPr lvl="1"/>
+            <a:r>
+              <a:t>Section 3: Knowledge transfer and onboarding. EMP045 contributes to ast emp045 01 through recurring collaboration, clear ownership boundaries, and measurable outcomes. The team captures decisions, open issues, and handoffs so that knowledge remains discoverable for future programs.</a:t>
             </a:r>
           </a:p>
         </p:txBody>
